--- a/Adventure works Presentation .pptx
+++ b/Adventure works Presentation .pptx
@@ -5,12 +5,14 @@
     <p:sldMasterId id="2147483648" r:id="rId1"/>
   </p:sldMasterIdLst>
   <p:sldIdLst>
-    <p:sldId id="256" r:id="rId3"/>
-    <p:sldId id="257" r:id="rId4"/>
-    <p:sldId id="258" r:id="rId5"/>
-    <p:sldId id="259" r:id="rId6"/>
-    <p:sldId id="260" r:id="rId7"/>
-    <p:sldId id="261" r:id="rId8"/>
+    <p:sldId id="263" r:id="rId3"/>
+    <p:sldId id="256" r:id="rId4"/>
+    <p:sldId id="257" r:id="rId5"/>
+    <p:sldId id="258" r:id="rId6"/>
+    <p:sldId id="259" r:id="rId7"/>
+    <p:sldId id="260" r:id="rId8"/>
+    <p:sldId id="261" r:id="rId9"/>
+    <p:sldId id="262" r:id="rId10"/>
   </p:sldIdLst>
   <p:sldSz cx="12192000" cy="6858000"/>
   <p:notesSz cx="6858000" cy="9144000"/>
@@ -18873,8 +18875,266 @@
         </p:nvSpPr>
         <p:spPr>
           <a:xfrm>
+            <a:off x="321310" y="1195705"/>
+            <a:ext cx="8128000" cy="3510915"/>
+          </a:xfrm>
+          <a:prstGeom prst="rect">
+            <a:avLst/>
+          </a:prstGeom>
+        </p:spPr>
+        <p:txBody>
+          <a:bodyPr>
+            <a:noAutofit/>
+            <a:extLst>
+              <a:ext uri="{4A0BC546-FE56-4ADE-93B0-CB8AF2F6F144}">
+                <wpsdc:textFrameExt xmlns:wpsdc="http://www.wps.cn/officeDocument/2022/drawingmlCustomData" type="title"/>
+              </a:ext>
+            </a:extLst>
+          </a:bodyPr>
+          <a:p>
+            <a:pPr algn="l"/>
+            <a:r>
+              <a:rPr lang="en-US" sz="4800" b="1" spc="400">
+                <a:latin typeface="Arial" panose="020B0604020202020204" pitchFamily="34" charset="0"/>
+                <a:ea typeface="Microsoft YaHei" panose="020B0503020204020204" charset="-122"/>
+              </a:rPr>
+              <a:t>ADVENTURE WORKS DATA ANALYSIS </a:t>
+            </a:r>
+            <a:endParaRPr lang="en-US" sz="4800" b="1" spc="400">
+              <a:latin typeface="Arial" panose="020B0604020202020204" pitchFamily="34" charset="0"/>
+              <a:ea typeface="Microsoft YaHei" panose="020B0503020204020204" charset="-122"/>
+            </a:endParaRPr>
+          </a:p>
+        </p:txBody>
+      </p:sp>
+      <p:sp>
+        <p:nvSpPr>
+          <p:cNvPr id="8" name="Text Box 7"/>
+          <p:cNvSpPr txBox="1"/>
+          <p:nvPr/>
+        </p:nvSpPr>
+        <p:spPr>
+          <a:xfrm>
+            <a:off x="433070" y="4138295"/>
+            <a:ext cx="4761230" cy="568325"/>
+          </a:xfrm>
+          <a:prstGeom prst="rect">
+            <a:avLst/>
+          </a:prstGeom>
+        </p:spPr>
+        <p:txBody>
+          <a:bodyPr>
+            <a:noAutofit/>
+            <a:extLst>
+              <a:ext uri="{4A0BC546-FE56-4ADE-93B0-CB8AF2F6F144}">
+                <wpsdc:textFrameExt xmlns:wpsdc="http://www.wps.cn/officeDocument/2022/drawingmlCustomData" type="text"/>
+              </a:ext>
+            </a:extLst>
+          </a:bodyPr>
+          <a:p>
+            <a:pPr algn="l"/>
+            <a:r>
+              <a:rPr lang="en-US" sz="3200" b="1">
+                <a:latin typeface="Arial" panose="020B0604020202020204" pitchFamily="34" charset="0"/>
+                <a:ea typeface="Microsoft YaHei" panose="020B0503020204020204" charset="-122"/>
+              </a:rPr>
+              <a:t>Group 2 presentation</a:t>
+            </a:r>
+            <a:endParaRPr lang="en-US" sz="3200" b="1">
+              <a:latin typeface="Arial" panose="020B0604020202020204" pitchFamily="34" charset="0"/>
+              <a:ea typeface="Microsoft YaHei" panose="020B0503020204020204" charset="-122"/>
+            </a:endParaRPr>
+          </a:p>
+        </p:txBody>
+      </p:sp>
+      <p:sp>
+        <p:nvSpPr>
+          <p:cNvPr id="9" name="Text Box 8"/>
+          <p:cNvSpPr txBox="1"/>
+          <p:nvPr/>
+        </p:nvSpPr>
+        <p:spPr>
+          <a:xfrm>
+            <a:off x="433070" y="4706535"/>
+            <a:ext cx="4064000" cy="368300"/>
+          </a:xfrm>
+          <a:prstGeom prst="rect">
+            <a:avLst/>
+          </a:prstGeom>
+        </p:spPr>
+        <p:txBody>
+          <a:bodyPr>
+            <a:spAutoFit/>
+            <a:extLst>
+              <a:ext uri="{4A0BC546-FE56-4ADE-93B0-CB8AF2F6F144}">
+                <wpsdc:textFrameExt xmlns:wpsdc="http://www.wps.cn/officeDocument/2022/drawingmlCustomData" type="text"/>
+              </a:ext>
+            </a:extLst>
+          </a:bodyPr>
+          <a:p>
+            <a:pPr algn="l"/>
+            <a:r>
+              <a:rPr lang="en-US" sz="1800">
+                <a:latin typeface="Arial" panose="020B0604020202020204" pitchFamily="34" charset="0"/>
+                <a:ea typeface="Microsoft YaHei" panose="020B0503020204020204" charset="-122"/>
+              </a:rPr>
+              <a:t>Project Lead : Nike</a:t>
+            </a:r>
+            <a:endParaRPr lang="en-US" sz="1800">
+              <a:latin typeface="Arial" panose="020B0604020202020204" pitchFamily="34" charset="0"/>
+              <a:ea typeface="Microsoft YaHei" panose="020B0503020204020204" charset="-122"/>
+            </a:endParaRPr>
+          </a:p>
+        </p:txBody>
+      </p:sp>
+      <p:sp>
+        <p:nvSpPr>
+          <p:cNvPr id="10" name="Text Box 9"/>
+          <p:cNvSpPr txBox="1"/>
+          <p:nvPr/>
+        </p:nvSpPr>
+        <p:spPr>
+          <a:xfrm>
+            <a:off x="433070" y="5074835"/>
+            <a:ext cx="4064000" cy="368300"/>
+          </a:xfrm>
+          <a:prstGeom prst="rect">
+            <a:avLst/>
+          </a:prstGeom>
+        </p:spPr>
+        <p:txBody>
+          <a:bodyPr>
+            <a:spAutoFit/>
+            <a:extLst>
+              <a:ext uri="{4A0BC546-FE56-4ADE-93B0-CB8AF2F6F144}">
+                <wpsdc:textFrameExt xmlns:wpsdc="http://www.wps.cn/officeDocument/2022/drawingmlCustomData" type="text"/>
+              </a:ext>
+            </a:extLst>
+          </a:bodyPr>
+          <a:p>
+            <a:pPr algn="l"/>
+            <a:r>
+              <a:rPr lang="en-US" sz="1800">
+                <a:latin typeface="Arial" panose="020B0604020202020204" pitchFamily="34" charset="0"/>
+                <a:ea typeface="Microsoft YaHei" panose="020B0503020204020204" charset="-122"/>
+              </a:rPr>
+              <a:t>Analyst : David</a:t>
+            </a:r>
+            <a:endParaRPr lang="en-US" sz="1800">
+              <a:latin typeface="Arial" panose="020B0604020202020204" pitchFamily="34" charset="0"/>
+              <a:ea typeface="Microsoft YaHei" panose="020B0503020204020204" charset="-122"/>
+            </a:endParaRPr>
+          </a:p>
+        </p:txBody>
+      </p:sp>
+      <p:sp>
+        <p:nvSpPr>
+          <p:cNvPr id="11" name="Text Box 10"/>
+          <p:cNvSpPr txBox="1"/>
+          <p:nvPr/>
+        </p:nvSpPr>
+        <p:spPr>
+          <a:xfrm>
+            <a:off x="433070" y="5443135"/>
+            <a:ext cx="4064000" cy="368300"/>
+          </a:xfrm>
+          <a:prstGeom prst="rect">
+            <a:avLst/>
+          </a:prstGeom>
+        </p:spPr>
+        <p:txBody>
+          <a:bodyPr>
+            <a:spAutoFit/>
+            <a:extLst>
+              <a:ext uri="{4A0BC546-FE56-4ADE-93B0-CB8AF2F6F144}">
+                <wpsdc:textFrameExt xmlns:wpsdc="http://www.wps.cn/officeDocument/2022/drawingmlCustomData" type="text"/>
+              </a:ext>
+            </a:extLst>
+          </a:bodyPr>
+          <a:p>
+            <a:pPr algn="l"/>
+            <a:r>
+              <a:rPr lang="en-US" sz="1800">
+                <a:latin typeface="Arial" panose="020B0604020202020204" pitchFamily="34" charset="0"/>
+                <a:ea typeface="Microsoft YaHei" panose="020B0503020204020204" charset="-122"/>
+              </a:rPr>
+              <a:t>Designer : Micheal</a:t>
+            </a:r>
+            <a:endParaRPr lang="en-US" sz="1800">
+              <a:latin typeface="Arial" panose="020B0604020202020204" pitchFamily="34" charset="0"/>
+              <a:ea typeface="Microsoft YaHei" panose="020B0503020204020204" charset="-122"/>
+            </a:endParaRPr>
+          </a:p>
+        </p:txBody>
+      </p:sp>
+      <p:sp>
+        <p:nvSpPr>
+          <p:cNvPr id="13" name="Text Box 12"/>
+          <p:cNvSpPr txBox="1"/>
+          <p:nvPr/>
+        </p:nvSpPr>
+        <p:spPr>
+          <a:xfrm>
+            <a:off x="433070" y="5811435"/>
+            <a:ext cx="4064000" cy="368300"/>
+          </a:xfrm>
+          <a:prstGeom prst="rect">
+            <a:avLst/>
+          </a:prstGeom>
+        </p:spPr>
+        <p:txBody>
+          <a:bodyPr>
+            <a:spAutoFit/>
+            <a:extLst>
+              <a:ext uri="{4A0BC546-FE56-4ADE-93B0-CB8AF2F6F144}">
+                <wpsdc:textFrameExt xmlns:wpsdc="http://www.wps.cn/officeDocument/2022/drawingmlCustomData" type="text"/>
+              </a:ext>
+            </a:extLst>
+          </a:bodyPr>
+          <a:p>
+            <a:pPr algn="l"/>
+            <a:r>
+              <a:rPr lang="en-US" sz="1800">
+                <a:latin typeface="Arial" panose="020B0604020202020204" pitchFamily="34" charset="0"/>
+                <a:ea typeface="Microsoft YaHei" panose="020B0503020204020204" charset="-122"/>
+              </a:rPr>
+              <a:t>Speaker : Abubakar</a:t>
+            </a:r>
+            <a:endParaRPr lang="en-US" sz="1800">
+              <a:latin typeface="Arial" panose="020B0604020202020204" pitchFamily="34" charset="0"/>
+              <a:ea typeface="Microsoft YaHei" panose="020B0503020204020204" charset="-122"/>
+            </a:endParaRPr>
+          </a:p>
+        </p:txBody>
+      </p:sp>
+    </p:spTree>
+  </p:cSld>
+  <p:clrMapOvr>
+    <a:masterClrMapping/>
+  </p:clrMapOvr>
+</p:sld>
+</file>
+
+<file path=ppt/slides/slide2.xml><?xml version="1.0" encoding="utf-8"?>
+<p:sld xmlns:a="http://schemas.openxmlformats.org/drawingml/2006/main" xmlns:r="http://schemas.openxmlformats.org/officeDocument/2006/relationships" xmlns:p="http://schemas.openxmlformats.org/presentationml/2006/main">
+  <p:cSld>
+    <p:spTree>
+      <p:nvGrpSpPr>
+        <p:cNvPr id="1" name=""/>
+        <p:cNvGrpSpPr/>
+        <p:nvPr/>
+      </p:nvGrpSpPr>
+      <p:grpSpPr/>
+      <p:sp>
+        <p:nvSpPr>
+          <p:cNvPr id="4" name="Text Box 3"/>
+          <p:cNvSpPr txBox="1"/>
+          <p:nvPr/>
+        </p:nvSpPr>
+        <p:spPr>
+          <a:xfrm>
             <a:off x="255270" y="248285"/>
-            <a:ext cx="4634230" cy="2861310"/>
+            <a:ext cx="4634230" cy="2891790"/>
           </a:xfrm>
           <a:prstGeom prst="rect">
             <a:avLst/>
@@ -18887,10 +19147,10 @@
           </a:bodyPr>
           <a:p>
             <a:r>
-              <a:rPr lang="en-US" altLang="en-GB"/>
-              <a:t>Key findings ( Fact Analysis )</a:t>
+              <a:rPr lang="en-US" altLang="en-GB" sz="2000" b="1"/>
+              <a:t>Key findings for Fact Analysis </a:t>
             </a:r>
-            <a:endParaRPr lang="en-US" altLang="en-GB"/>
+            <a:endParaRPr lang="en-US" altLang="en-GB" sz="2000" b="1"/>
           </a:p>
           <a:p>
             <a:pPr marL="285750" indent="-285750">
@@ -18995,7 +19255,7 @@
 </p:sld>
 </file>
 
-<file path=ppt/slides/slide2.xml><?xml version="1.0" encoding="utf-8"?>
+<file path=ppt/slides/slide3.xml><?xml version="1.0" encoding="utf-8"?>
 <p:sld xmlns:a="http://schemas.openxmlformats.org/drawingml/2006/main" xmlns:r="http://schemas.openxmlformats.org/officeDocument/2006/relationships" xmlns:p="http://schemas.openxmlformats.org/presentationml/2006/main">
   <p:cSld>
     <p:spTree>
@@ -19014,7 +19274,7 @@
         <p:spPr>
           <a:xfrm>
             <a:off x="299085" y="144145"/>
-            <a:ext cx="4064000" cy="3138170"/>
+            <a:ext cx="4064000" cy="3446145"/>
           </a:xfrm>
           <a:prstGeom prst="rect">
             <a:avLst/>
@@ -19027,10 +19287,10 @@
           </a:bodyPr>
           <a:p>
             <a:r>
-              <a:rPr lang="en-US" altLang="en-GB"/>
-              <a:t>Key findings (product Analysis)</a:t>
+              <a:rPr lang="en-US" altLang="en-GB" sz="2000" b="1"/>
+              <a:t>Key findings for product Analysis</a:t>
             </a:r>
-            <a:endParaRPr lang="en-US" altLang="en-GB"/>
+            <a:endParaRPr lang="en-US" altLang="en-GB" sz="2000" b="1"/>
           </a:p>
           <a:p>
             <a:pPr marL="285750" indent="-285750">
@@ -19050,7 +19310,7 @@
             </a:pPr>
             <a:r>
               <a:rPr lang="en-US" altLang="en-GB"/>
-              <a:t>Most of our porducts has not been assigned a class yet and needs to be</a:t>
+              <a:t>Most of our products have not been assigned a class yet and needs to be assigned</a:t>
             </a:r>
             <a:endParaRPr lang="en-US" altLang="en-GB"/>
           </a:p>
@@ -19081,7 +19341,7 @@
           <p:nvPr/>
         </p:nvGraphicFramePr>
         <p:xfrm>
-          <a:off x="6974205" y="341630"/>
+          <a:off x="6974205" y="357505"/>
           <a:ext cx="4826000" cy="2743200"/>
         </p:xfrm>
         <a:graphic>
@@ -19130,7 +19390,7 @@
 </p:sld>
 </file>
 
-<file path=ppt/slides/slide3.xml><?xml version="1.0" encoding="utf-8"?>
+<file path=ppt/slides/slide4.xml><?xml version="1.0" encoding="utf-8"?>
 <p:sld xmlns:a="http://schemas.openxmlformats.org/drawingml/2006/main" xmlns:r="http://schemas.openxmlformats.org/officeDocument/2006/relationships" xmlns:p="http://schemas.openxmlformats.org/presentationml/2006/main">
   <p:cSld>
     <p:spTree>
@@ -19165,7 +19425,7 @@
         <p:spPr>
           <a:xfrm>
             <a:off x="265430" y="241300"/>
-            <a:ext cx="4064000" cy="1476375"/>
+            <a:ext cx="4064000" cy="1506855"/>
           </a:xfrm>
           <a:prstGeom prst="rect">
             <a:avLst/>
@@ -19178,10 +19438,10 @@
           </a:bodyPr>
           <a:p>
             <a:r>
-              <a:rPr lang="en-US" altLang="en-GB"/>
-              <a:t>Key findings ( Territory analysis )</a:t>
+              <a:rPr lang="en-US" altLang="en-GB" sz="2000" b="1"/>
+              <a:t>Key findings for Territory analysis </a:t>
             </a:r>
-            <a:endParaRPr lang="en-US" altLang="en-GB"/>
+            <a:endParaRPr lang="en-US" altLang="en-GB" sz="2000" b="1"/>
           </a:p>
           <a:p>
             <a:pPr marL="285750" indent="-285750">
@@ -19228,7 +19488,7 @@
         </p:blipFill>
         <p:spPr>
           <a:xfrm>
-            <a:off x="556895" y="3429000"/>
+            <a:off x="556895" y="3460750"/>
             <a:ext cx="4396105" cy="2484755"/>
           </a:xfrm>
           <a:prstGeom prst="rect">
@@ -19244,7 +19504,7 @@
 </p:sld>
 </file>
 
-<file path=ppt/slides/slide4.xml><?xml version="1.0" encoding="utf-8"?>
+<file path=ppt/slides/slide5.xml><?xml version="1.0" encoding="utf-8"?>
 <p:sld xmlns:a="http://schemas.openxmlformats.org/drawingml/2006/main" xmlns:r="http://schemas.openxmlformats.org/officeDocument/2006/relationships" xmlns:p="http://schemas.openxmlformats.org/presentationml/2006/main">
   <p:cSld>
     <p:spTree>
@@ -19263,7 +19523,7 @@
         <p:spPr>
           <a:xfrm>
             <a:off x="299085" y="297180"/>
-            <a:ext cx="4064000" cy="3138170"/>
+            <a:ext cx="4064000" cy="3446145"/>
           </a:xfrm>
           <a:prstGeom prst="rect">
             <a:avLst/>
@@ -19276,10 +19536,10 @@
           </a:bodyPr>
           <a:p>
             <a:r>
-              <a:rPr lang="en-US" altLang="en-GB"/>
-              <a:t>Key  findings ( Date Analysis )</a:t>
+              <a:rPr lang="en-US" altLang="en-GB" sz="2000" b="1"/>
+              <a:t>Key  findings for Date Analysis </a:t>
             </a:r>
-            <a:endParaRPr lang="en-US" altLang="en-GB"/>
+            <a:endParaRPr lang="en-US" altLang="en-GB" sz="2000" b="1"/>
           </a:p>
           <a:p>
             <a:pPr marL="285750" indent="-285750">
@@ -19290,7 +19550,7 @@
               <a:rPr lang="en-US" altLang="en-GB">
                 <a:sym typeface="+mn-ea"/>
               </a:rPr>
-              <a:t>Between the interval of 5yrs, the year 2008 has yielded more sales for us than the rest  </a:t>
+              <a:t>Between the interval of 5yrs, the year 2008 has yielded more sales for us than the rest , because of the holiday season. </a:t>
             </a:r>
             <a:endParaRPr lang="en-US" altLang="en-GB"/>
           </a:p>
@@ -19301,7 +19561,7 @@
             </a:pPr>
             <a:r>
               <a:rPr lang="en-US" altLang="en-GB"/>
-              <a:t>The month of January, March, May , July, August, October and December of  the year 2008 has been recorded to have the highest month of sales </a:t>
+              <a:t>The month of January, March, May , July, August, October and December of  the year 2008 has been recorded to have the highest month of sales. </a:t>
             </a:r>
             <a:endParaRPr lang="en-US" altLang="en-GB"/>
           </a:p>
@@ -19312,7 +19572,7 @@
             </a:pPr>
             <a:r>
               <a:rPr lang="en-US" altLang="en-GB"/>
-              <a:t>The third and fourth quarter of the year 2008 has yielded more sales than the rest </a:t>
+              <a:t>The third and fourth quarter of the year 2008 has yielded more sales than the rest</a:t>
             </a:r>
             <a:endParaRPr lang="en-US" altLang="en-GB"/>
           </a:p>
@@ -19357,8 +19617,8 @@
           <p:nvPr/>
         </p:nvGraphicFramePr>
         <p:xfrm>
-          <a:off x="1272540" y="3500755"/>
-          <a:ext cx="4826000" cy="2743200"/>
+          <a:off x="1272540" y="3711575"/>
+          <a:ext cx="4826000" cy="3010535"/>
         </p:xfrm>
         <a:graphic>
           <a:graphicData uri="http://schemas.openxmlformats.org/drawingml/2006/chart">
@@ -19374,7 +19634,7 @@
 </p:sld>
 </file>
 
-<file path=ppt/slides/slide5.xml><?xml version="1.0" encoding="utf-8"?>
+<file path=ppt/slides/slide6.xml><?xml version="1.0" encoding="utf-8"?>
 <p:sld xmlns:a="http://schemas.openxmlformats.org/drawingml/2006/main" xmlns:r="http://schemas.openxmlformats.org/officeDocument/2006/relationships" xmlns:p="http://schemas.openxmlformats.org/presentationml/2006/main">
   <p:cSld>
     <p:spTree>
@@ -19393,7 +19653,7 @@
         <p:spPr>
           <a:xfrm>
             <a:off x="243205" y="164465"/>
-            <a:ext cx="4064000" cy="2861310"/>
+            <a:ext cx="4064000" cy="2891790"/>
           </a:xfrm>
           <a:prstGeom prst="rect">
             <a:avLst/>
@@ -19406,10 +19666,10 @@
           </a:bodyPr>
           <a:p>
             <a:r>
-              <a:rPr lang="en-US" altLang="en-GB"/>
-              <a:t>Key findings ( Customer Analysis )</a:t>
+              <a:rPr lang="en-US" altLang="en-GB" sz="2000" b="1"/>
+              <a:t>Key findings for Customer Analysis </a:t>
             </a:r>
-            <a:endParaRPr lang="en-US" altLang="en-GB"/>
+            <a:endParaRPr lang="en-US" altLang="en-GB" sz="2000" b="1"/>
           </a:p>
           <a:p>
             <a:pPr marL="285750" indent="-285750">
@@ -19418,7 +19678,7 @@
             </a:pPr>
             <a:r>
               <a:rPr lang="en-US" altLang="en-GB"/>
-              <a:t>28% of our customer have no child at all while the rest 8% to 20% have at least one child</a:t>
+              <a:t>28% of our customer have no child at all while the rest 72% have atleast 1  child.</a:t>
             </a:r>
             <a:endParaRPr lang="en-US" altLang="en-GB"/>
           </a:p>
@@ -19461,7 +19721,7 @@
         </p:nvGraphicFramePr>
         <p:xfrm>
           <a:off x="6222365" y="164465"/>
-          <a:ext cx="5466080" cy="2743200"/>
+          <a:ext cx="5466080" cy="2861945"/>
         </p:xfrm>
         <a:graphic>
           <a:graphicData uri="http://schemas.openxmlformats.org/drawingml/2006/chart">
@@ -19476,8 +19736,8 @@
           <p:nvPr/>
         </p:nvGraphicFramePr>
         <p:xfrm>
-          <a:off x="6222365" y="3429000"/>
-          <a:ext cx="5466080" cy="2743200"/>
+          <a:off x="6222365" y="3317875"/>
+          <a:ext cx="5466080" cy="2972435"/>
         </p:xfrm>
         <a:graphic>
           <a:graphicData uri="http://schemas.openxmlformats.org/drawingml/2006/chart">
@@ -19492,8 +19752,8 @@
           <p:nvPr/>
         </p:nvGraphicFramePr>
         <p:xfrm>
-          <a:off x="548005" y="3429000"/>
-          <a:ext cx="5466080" cy="2743200"/>
+          <a:off x="243205" y="3025775"/>
+          <a:ext cx="5770880" cy="3146425"/>
         </p:xfrm>
         <a:graphic>
           <a:graphicData uri="http://schemas.openxmlformats.org/drawingml/2006/chart">
@@ -19509,7 +19769,7 @@
 </p:sld>
 </file>
 
-<file path=ppt/slides/slide6.xml><?xml version="1.0" encoding="utf-8"?>
+<file path=ppt/slides/slide7.xml><?xml version="1.0" encoding="utf-8"?>
 <p:sld xmlns:a="http://schemas.openxmlformats.org/drawingml/2006/main" xmlns:r="http://schemas.openxmlformats.org/officeDocument/2006/relationships" xmlns:p="http://schemas.openxmlformats.org/presentationml/2006/main">
   <p:cSld>
     <p:spTree>
@@ -19544,7 +19804,7 @@
         <p:spPr>
           <a:xfrm>
             <a:off x="332105" y="297180"/>
-            <a:ext cx="4064000" cy="2306955"/>
+            <a:ext cx="4064000" cy="2338070"/>
           </a:xfrm>
           <a:prstGeom prst="rect">
             <a:avLst/>
@@ -19557,10 +19817,10 @@
           </a:bodyPr>
           <a:p>
             <a:r>
-              <a:rPr lang="en-US" altLang="en-GB"/>
-              <a:t>Key findings ( Geography Analysis )</a:t>
+              <a:rPr lang="en-US" altLang="en-GB" sz="2000" b="1"/>
+              <a:t>Key findings for Geography Analysis </a:t>
             </a:r>
-            <a:endParaRPr lang="en-US" altLang="en-GB"/>
+            <a:endParaRPr lang="en-US" altLang="en-GB" sz="2000" b="1"/>
           </a:p>
           <a:p>
             <a:pPr marL="285750" indent="-285750">
@@ -19638,6 +19898,152 @@
   <p:clrMapOvr>
     <a:masterClrMapping/>
   </p:clrMapOvr>
+</p:sld>
+</file>
+
+<file path=ppt/slides/slide8.xml><?xml version="1.0" encoding="utf-8"?>
+<p:sld xmlns:a="http://schemas.openxmlformats.org/drawingml/2006/main" xmlns:r="http://schemas.openxmlformats.org/officeDocument/2006/relationships" xmlns:p="http://schemas.openxmlformats.org/presentationml/2006/main">
+  <p:cSld>
+    <p:spTree>
+      <p:nvGrpSpPr>
+        <p:cNvPr id="1" name=""/>
+        <p:cNvGrpSpPr/>
+        <p:nvPr/>
+      </p:nvGrpSpPr>
+      <p:grpSpPr/>
+      <p:sp>
+        <p:nvSpPr>
+          <p:cNvPr id="4" name="Text Box 3"/>
+          <p:cNvSpPr txBox="1"/>
+          <p:nvPr/>
+        </p:nvSpPr>
+        <p:spPr>
+          <a:xfrm>
+            <a:off x="522605" y="375285"/>
+            <a:ext cx="8430895" cy="4465320"/>
+          </a:xfrm>
+          <a:prstGeom prst="rect">
+            <a:avLst/>
+          </a:prstGeom>
+        </p:spPr>
+        <p:txBody>
+          <a:bodyPr>
+            <a:noAutofit/>
+            <a:extLst>
+              <a:ext uri="{4A0BC546-FE56-4ADE-93B0-CB8AF2F6F144}">
+                <wpsdc:textFrameExt xmlns:wpsdc="http://www.wps.cn/officeDocument/2022/drawingmlCustomData" type="text"/>
+              </a:ext>
+            </a:extLst>
+          </a:bodyPr>
+          <a:p>
+            <a:pPr algn="l"/>
+            <a:r>
+              <a:rPr lang="en-US" sz="1800" b="1">
+                <a:latin typeface="Arial" panose="020B0604020202020204" pitchFamily="34" charset="0"/>
+                <a:ea typeface="Microsoft YaHei" panose="020B0503020204020204" charset="-122"/>
+              </a:rPr>
+              <a:t>Conclusion || Suggestion</a:t>
+            </a:r>
+            <a:endParaRPr lang="en-US" sz="1800" b="1">
+              <a:latin typeface="Arial" panose="020B0604020202020204" pitchFamily="34" charset="0"/>
+              <a:ea typeface="Microsoft YaHei" panose="020B0503020204020204" charset="-122"/>
+            </a:endParaRPr>
+          </a:p>
+          <a:p>
+            <a:pPr indent="0" algn="l">
+              <a:buNone/>
+            </a:pPr>
+            <a:endParaRPr lang="en-US" sz="1800" b="1">
+              <a:latin typeface="Arial" panose="020B0604020202020204" pitchFamily="34" charset="0"/>
+              <a:ea typeface="Microsoft YaHei" panose="020B0503020204020204" charset="-122"/>
+            </a:endParaRPr>
+          </a:p>
+          <a:p>
+            <a:pPr marL="285750" indent="-285750" algn="l">
+              <a:buFont typeface="Arial" panose="020B0604020202020204" pitchFamily="34" charset="0"/>
+              <a:buChar char="•"/>
+            </a:pPr>
+            <a:r>
+              <a:rPr lang="en-US" sz="1800">
+                <a:latin typeface="Arial" panose="020B0604020202020204" pitchFamily="34" charset="0"/>
+                <a:ea typeface="Microsoft YaHei" panose="020B0503020204020204" charset="-122"/>
+              </a:rPr>
+              <a:t>Since sales skyrocketed during holiday, we should stock more preceeding the holiday season.</a:t>
+            </a:r>
+            <a:endParaRPr lang="en-US" sz="1800">
+              <a:latin typeface="Arial" panose="020B0604020202020204" pitchFamily="34" charset="0"/>
+              <a:ea typeface="Microsoft YaHei" panose="020B0503020204020204" charset="-122"/>
+            </a:endParaRPr>
+          </a:p>
+          <a:p>
+            <a:pPr marL="285750" indent="-285750" algn="l">
+              <a:buFont typeface="Arial" panose="020B0604020202020204" pitchFamily="34" charset="0"/>
+              <a:buChar char="•"/>
+            </a:pPr>
+            <a:r>
+              <a:rPr lang="en-US" sz="1800">
+                <a:latin typeface="Arial" panose="020B0604020202020204" pitchFamily="34" charset="0"/>
+                <a:ea typeface="Microsoft YaHei" panose="020B0503020204020204" charset="-122"/>
+              </a:rPr>
+              <a:t>Since majority of our customers are Males, we should focus more on manufacturing male-centered products.</a:t>
+            </a:r>
+            <a:endParaRPr lang="en-US" sz="1800">
+              <a:latin typeface="Arial" panose="020B0604020202020204" pitchFamily="34" charset="0"/>
+              <a:ea typeface="Microsoft YaHei" panose="020B0503020204020204" charset="-122"/>
+            </a:endParaRPr>
+          </a:p>
+          <a:p>
+            <a:pPr marL="285750" indent="-285750" algn="l">
+              <a:buFont typeface="Arial" panose="020B0604020202020204" pitchFamily="34" charset="0"/>
+              <a:buChar char="•"/>
+            </a:pPr>
+            <a:r>
+              <a:rPr lang="en-US" sz="1800">
+                <a:latin typeface="Arial" panose="020B0604020202020204" pitchFamily="34" charset="0"/>
+                <a:ea typeface="Microsoft YaHei" panose="020B0503020204020204" charset="-122"/>
+              </a:rPr>
+              <a:t>We should make our products fit in the yearly income of our customers for affordability.</a:t>
+            </a:r>
+            <a:endParaRPr lang="en-US" sz="1800">
+              <a:latin typeface="Arial" panose="020B0604020202020204" pitchFamily="34" charset="0"/>
+              <a:ea typeface="Microsoft YaHei" panose="020B0503020204020204" charset="-122"/>
+            </a:endParaRPr>
+          </a:p>
+          <a:p>
+            <a:pPr marL="285750" indent="-285750" algn="l">
+              <a:buFont typeface="Arial" panose="020B0604020202020204" pitchFamily="34" charset="0"/>
+              <a:buChar char="•"/>
+            </a:pPr>
+            <a:r>
+              <a:rPr lang="en-US" sz="1800">
+                <a:latin typeface="Arial" panose="020B0604020202020204" pitchFamily="34" charset="0"/>
+                <a:ea typeface="Microsoft YaHei" panose="020B0503020204020204" charset="-122"/>
+              </a:rPr>
+              <a:t>We should manufacture products that support the western-culture since majority of our customer-base is from the West-Region.</a:t>
+            </a:r>
+            <a:endParaRPr lang="en-US" sz="1800">
+              <a:latin typeface="Arial" panose="020B0604020202020204" pitchFamily="34" charset="0"/>
+              <a:ea typeface="Microsoft YaHei" panose="020B0503020204020204" charset="-122"/>
+            </a:endParaRPr>
+          </a:p>
+          <a:p>
+            <a:pPr marL="285750" indent="-285750" algn="l">
+              <a:buFont typeface="Arial" panose="020B0604020202020204" pitchFamily="34" charset="0"/>
+              <a:buChar char="•"/>
+            </a:pPr>
+            <a:endParaRPr lang="en-US" sz="1800">
+              <a:latin typeface="Arial" panose="020B0604020202020204" pitchFamily="34" charset="0"/>
+              <a:ea typeface="Microsoft YaHei" panose="020B0503020204020204" charset="-122"/>
+            </a:endParaRPr>
+          </a:p>
+        </p:txBody>
+      </p:sp>
+    </p:spTree>
+  </p:cSld>
+  <p:clrMapOvr>
+    <a:masterClrMapping/>
+  </p:clrMapOvr>
+  <p:transition/>
 </p:sld>
 </file>
 
